--- a/lecture_pptx/out/s11/ワーク01_講師用.pptx
+++ b/lecture_pptx/out/s11/ワーク01_講師用.pptx
@@ -1106,7 +1106,7 @@
                 <a:ea typeface="Yu Gothic UI Semibold" pitchFamily="34" charset="-122"/>
                 <a:cs typeface="Yu Gothic UI Semibold" pitchFamily="34" charset="-120"/>
               </a:rPr>
-              <a:t>公式LINE/Lステップ 設定 + シナリオ設計</a:t>
+              <a:t>LINE リッチメニュー × GAS チャットボット</a:t>
             </a:r>
             <a:endParaRPr lang="en-US" sz="3800" dirty="0"/>
           </a:p>
@@ -1145,7 +1145,7 @@
                 <a:ea typeface="Yu Gothic UI" pitchFamily="34" charset="-122"/>
                 <a:cs typeface="Yu Gothic UI" pitchFamily="34" charset="-120"/>
               </a:rPr>
-              <a:t>第10回の素材を本番稼働させ、興味度別シナリオまで一気に組み上げる</a:t>
+              <a:t>保険相談の入口を24時間動かす、自作チャットボットを完成させる</a:t>
             </a:r>
             <a:endParaRPr lang="en-US" sz="1900" dirty="0"/>
           </a:p>
@@ -1275,7 +1275,7 @@
                 <a:ea typeface="Yu Gothic UI Semibold" pitchFamily="34" charset="-122"/>
                 <a:cs typeface="Yu Gothic UI Semibold" pitchFamily="34" charset="-120"/>
               </a:rPr>
-              <a:t>演習1 公式LINE/Lステップ の本番設定 — 解答・指導ポイント</a:t>
+              <a:t>演習1 チャットボットの動線を設計 — 解答・指導ポイント</a:t>
             </a:r>
             <a:endParaRPr lang="en-US" sz="2600" dirty="0"/>
           </a:p>
@@ -1442,7 +1442,7 @@
                 <a:ea typeface="Yu Gothic UI" pitchFamily="34" charset="-122"/>
                 <a:cs typeface="Yu Gothic UI" pitchFamily="34" charset="-120"/>
               </a:rPr>
-              <a:t>※設定作業中心。Gemini に聞く例:</a:t>
+              <a:t>【貼り付け用】</a:t>
             </a:r>
             <a:endParaRPr lang="en-US" sz="1400" dirty="0"/>
           </a:p>
@@ -1462,7 +1462,7 @@
                 <a:ea typeface="Yu Gothic UI" pitchFamily="34" charset="-122"/>
                 <a:cs typeface="Yu Gothic UI" pitchFamily="34" charset="-120"/>
               </a:rPr>
-              <a:t>「公式LINE Manager で『リッチメニュー設置 → ステップ配信登録 → タグ自動付与』を一気に終える手順を、初心者向けに10ステップで教えて」</a:t>
+              <a:t>保険営業の LINE 公式アカウントに設置するチャットボットの動線を設計してください。</a:t>
             </a:r>
             <a:endParaRPr lang="en-US" sz="1400" dirty="0"/>
           </a:p>
@@ -1482,7 +1482,87 @@
                 <a:ea typeface="Yu Gothic UI" pitchFamily="34" charset="-122"/>
                 <a:cs typeface="Yu Gothic UI" pitchFamily="34" charset="-120"/>
               </a:rPr>
-              <a:t>Lステップ利用時は「Lステップで同じ設定をする手順」と聞き分け。</a:t>
+              <a:t>・リッチメニュー6ボタン: (例) 保険の種類/資料請求/相談予約/よくある質問/お客様の声/プロフィール</a:t>
+            </a:r>
+            <a:endParaRPr lang="en-US" sz="1400" dirty="0"/>
+          </a:p>
+          <a:p>
+            <a:pPr indent="0" marL="0">
+              <a:spcAft>
+                <a:spcPts val="400"/>
+              </a:spcAft>
+              <a:buNone/>
+            </a:pPr>
+            <a:r>
+              <a:rPr lang="en-US" sz="1400" dirty="0">
+                <a:solidFill>
+                  <a:srgbClr val="1A1A1A"/>
+                </a:solidFill>
+                <a:latin typeface="Yu Gothic UI" pitchFamily="34" charset="0"/>
+                <a:ea typeface="Yu Gothic UI" pitchFamily="34" charset="-122"/>
+                <a:cs typeface="Yu Gothic UI" pitchFamily="34" charset="-120"/>
+              </a:rPr>
+              <a:t>・各ボタンをタップした時の最初の返答</a:t>
+            </a:r>
+            <a:endParaRPr lang="en-US" sz="1400" dirty="0"/>
+          </a:p>
+          <a:p>
+            <a:pPr indent="0" marL="0">
+              <a:spcAft>
+                <a:spcPts val="400"/>
+              </a:spcAft>
+              <a:buNone/>
+            </a:pPr>
+            <a:r>
+              <a:rPr lang="en-US" sz="1400" dirty="0">
+                <a:solidFill>
+                  <a:srgbClr val="1A1A1A"/>
+                </a:solidFill>
+                <a:latin typeface="Yu Gothic UI" pitchFamily="34" charset="0"/>
+                <a:ea typeface="Yu Gothic UI" pitchFamily="34" charset="-122"/>
+                <a:cs typeface="Yu Gothic UI" pitchFamily="34" charset="-120"/>
+              </a:rPr>
+              <a:t>・3往復までの会話フロー</a:t>
+            </a:r>
+            <a:endParaRPr lang="en-US" sz="1400" dirty="0"/>
+          </a:p>
+          <a:p>
+            <a:pPr indent="0" marL="0">
+              <a:spcAft>
+                <a:spcPts val="400"/>
+              </a:spcAft>
+              <a:buNone/>
+            </a:pPr>
+            <a:r>
+              <a:rPr lang="en-US" sz="1400" dirty="0">
+                <a:solidFill>
+                  <a:srgbClr val="1A1A1A"/>
+                </a:solidFill>
+                <a:latin typeface="Yu Gothic UI" pitchFamily="34" charset="0"/>
+                <a:ea typeface="Yu Gothic UI" pitchFamily="34" charset="-122"/>
+                <a:cs typeface="Yu Gothic UI" pitchFamily="34" charset="-120"/>
+              </a:rPr>
+              <a:t>・最終ゴール(予約/資料DL/相談員引き渡し) を明示</a:t>
+            </a:r>
+            <a:endParaRPr lang="en-US" sz="1400" dirty="0"/>
+          </a:p>
+          <a:p>
+            <a:pPr indent="0" marL="0">
+              <a:spcAft>
+                <a:spcPts val="400"/>
+              </a:spcAft>
+              <a:buNone/>
+            </a:pPr>
+            <a:r>
+              <a:rPr lang="en-US" sz="1400" dirty="0">
+                <a:solidFill>
+                  <a:srgbClr val="1A1A1A"/>
+                </a:solidFill>
+                <a:latin typeface="Yu Gothic UI" pitchFamily="34" charset="0"/>
+                <a:ea typeface="Yu Gothic UI" pitchFamily="34" charset="-122"/>
+                <a:cs typeface="Yu Gothic UI" pitchFamily="34" charset="-120"/>
+              </a:rPr>
+              <a:t>選択肢は3つまで。難しい相談は「担当者に繋ぐ」で終わる。</a:t>
             </a:r>
             <a:endParaRPr lang="en-US" sz="1400" dirty="0"/>
           </a:p>
@@ -1610,7 +1690,7 @@
                 <a:ea typeface="Yu Gothic UI" pitchFamily="34" charset="-122"/>
                 <a:cs typeface="Yu Gothic UI" pitchFamily="34" charset="-120"/>
               </a:rPr>
-              <a:t>・プロフィール/メニュー/配信/タグ 4要素 すべて設定完了</a:t>
+              <a:t>・6ボタン × 動線設計表</a:t>
             </a:r>
             <a:endParaRPr lang="en-US" sz="1400" dirty="0"/>
           </a:p>
@@ -1630,7 +1710,7 @@
                 <a:ea typeface="Yu Gothic UI" pitchFamily="34" charset="-122"/>
                 <a:cs typeface="Yu Gothic UI" pitchFamily="34" charset="-120"/>
               </a:rPr>
-              <a:t>・テスト登録で Day1配信が届くこと確認</a:t>
+              <a:t>・最初の返答テキスト x 6</a:t>
             </a:r>
             <a:endParaRPr lang="en-US" sz="1400" dirty="0"/>
           </a:p>
@@ -1650,7 +1730,27 @@
                 <a:ea typeface="Yu Gothic UI" pitchFamily="34" charset="-122"/>
                 <a:cs typeface="Yu Gothic UI" pitchFamily="34" charset="-120"/>
               </a:rPr>
-              <a:t>・iOS/Android/PC で表示崩れなし</a:t>
+              <a:t>・分岐フロー図(3往復まで)</a:t>
+            </a:r>
+            <a:endParaRPr lang="en-US" sz="1400" dirty="0"/>
+          </a:p>
+          <a:p>
+            <a:pPr indent="0" marL="0">
+              <a:spcAft>
+                <a:spcPts val="400"/>
+              </a:spcAft>
+              <a:buNone/>
+            </a:pPr>
+            <a:r>
+              <a:rPr lang="en-US" sz="1400" dirty="0">
+                <a:solidFill>
+                  <a:srgbClr val="1A1A1A"/>
+                </a:solidFill>
+                <a:latin typeface="Yu Gothic UI" pitchFamily="34" charset="0"/>
+                <a:ea typeface="Yu Gothic UI" pitchFamily="34" charset="-122"/>
+                <a:cs typeface="Yu Gothic UI" pitchFamily="34" charset="-120"/>
+              </a:rPr>
+              <a:t>・ゴール別カウント</a:t>
             </a:r>
             <a:endParaRPr lang="en-US" sz="1400" dirty="0"/>
           </a:p>
@@ -1778,7 +1878,7 @@
                 <a:ea typeface="Yu Gothic UI" pitchFamily="34" charset="-122"/>
                 <a:cs typeface="Yu Gothic UI" pitchFamily="34" charset="-120"/>
               </a:rPr>
-              <a:t>・チェックリスト化を必須に。口頭の「OK」は信用しない。</a:t>
+              <a:t>・「全部AIで答える」設計になりがち。人に繋ぐ境界線を必ず決めさせる。</a:t>
             </a:r>
             <a:endParaRPr lang="en-US" sz="1400" dirty="0"/>
           </a:p>
@@ -1798,7 +1898,7 @@
                 <a:ea typeface="Yu Gothic UI" pitchFamily="34" charset="-122"/>
                 <a:cs typeface="Yu Gothic UI" pitchFamily="34" charset="-120"/>
               </a:rPr>
-              <a:t>・テスト配信のトリガー時間短縮 → 本番戻し漏れに注意。</a:t>
+              <a:t>・選択肢の数を4→3にする指導が重要。多いと押されない。</a:t>
             </a:r>
             <a:endParaRPr lang="en-US" sz="1400" dirty="0"/>
           </a:p>
@@ -1818,7 +1918,7 @@
                 <a:ea typeface="Yu Gothic UI" pitchFamily="34" charset="-122"/>
                 <a:cs typeface="Yu Gothic UI" pitchFamily="34" charset="-120"/>
               </a:rPr>
-              <a:t>・タグ運用は最初は3つだけ(新規/名刺/既存)。複雑化を防ぐ。</a:t>
+              <a:t>・設計を「スプシに保存」まで徹底、これが次の演習の仕様書になる。</a:t>
             </a:r>
             <a:endParaRPr lang="en-US" sz="1400" dirty="0"/>
           </a:p>
@@ -1909,7 +2009,7 @@
                 <a:ea typeface="Yu Gothic UI Semibold" pitchFamily="34" charset="-122"/>
                 <a:cs typeface="Yu Gothic UI Semibold" pitchFamily="34" charset="-120"/>
               </a:rPr>
-              <a:t>演習2 興味度別シナリオを3層で設計 — 解答・指導ポイント</a:t>
+              <a:t>演習2 GASでチャットボットを構築+リッチメニューに接続 — 解答・指導ポイント</a:t>
             </a:r>
             <a:endParaRPr lang="en-US" sz="2600" dirty="0"/>
           </a:p>
@@ -2096,7 +2196,7 @@
                 <a:ea typeface="Yu Gothic UI" pitchFamily="34" charset="-122"/>
                 <a:cs typeface="Yu Gothic UI" pitchFamily="34" charset="-120"/>
               </a:rPr>
-              <a:t>保険営業の興味度別シナリオを3層(高/中/低)で5日分作って。</a:t>
+              <a:t>LINE 公式アカウントのチャットボットを Google Apps Script で作ってください。</a:t>
             </a:r>
             <a:endParaRPr lang="en-US" sz="1400" dirty="0"/>
           </a:p>
@@ -2116,7 +2216,7 @@
                 <a:ea typeface="Yu Gothic UI" pitchFamily="34" charset="-122"/>
                 <a:cs typeface="Yu Gothic UI" pitchFamily="34" charset="-120"/>
               </a:rPr>
-              <a:t>・各層の判定基準を1行で</a:t>
+              <a:t>・仕様: doPost で Webhook を受け、以下のポストバックに応答</a:t>
             </a:r>
             <a:endParaRPr lang="en-US" sz="1400" dirty="0"/>
           </a:p>
@@ -2136,7 +2236,7 @@
                 <a:ea typeface="Yu Gothic UI" pitchFamily="34" charset="-122"/>
                 <a:cs typeface="Yu Gothic UI" pitchFamily="34" charset="-120"/>
               </a:rPr>
-              <a:t>・各日のテーマと配信内容(短文)</a:t>
+              <a:t>  - postback=type_life → 生命保険の説明を返信</a:t>
             </a:r>
             <a:endParaRPr lang="en-US" sz="1400" dirty="0"/>
           </a:p>
@@ -2156,7 +2256,87 @@
                 <a:ea typeface="Yu Gothic UI" pitchFamily="34" charset="-122"/>
                 <a:cs typeface="Yu Gothic UI" pitchFamily="34" charset="-120"/>
               </a:rPr>
-              <a:t>・層別の最終CV(予約/相談/資料請求)を明示</a:t>
+              <a:t>  - postback=doc_request → 資料請求フォームURLを返信</a:t>
+            </a:r>
+            <a:endParaRPr lang="en-US" sz="1400" dirty="0"/>
+          </a:p>
+          <a:p>
+            <a:pPr indent="0" marL="0">
+              <a:spcAft>
+                <a:spcPts val="400"/>
+              </a:spcAft>
+              <a:buNone/>
+            </a:pPr>
+            <a:r>
+              <a:rPr lang="en-US" sz="1400" dirty="0">
+                <a:solidFill>
+                  <a:srgbClr val="1A1A1A"/>
+                </a:solidFill>
+                <a:latin typeface="Yu Gothic UI" pitchFamily="34" charset="0"/>
+                <a:ea typeface="Yu Gothic UI" pitchFamily="34" charset="-122"/>
+                <a:cs typeface="Yu Gothic UI" pitchFamily="34" charset="-120"/>
+              </a:rPr>
+              <a:t>  - postback=book_meeting → 予約URLを返信</a:t>
+            </a:r>
+            <a:endParaRPr lang="en-US" sz="1400" dirty="0"/>
+          </a:p>
+          <a:p>
+            <a:pPr indent="0" marL="0">
+              <a:spcAft>
+                <a:spcPts val="400"/>
+              </a:spcAft>
+              <a:buNone/>
+            </a:pPr>
+            <a:r>
+              <a:rPr lang="en-US" sz="1400" dirty="0">
+                <a:solidFill>
+                  <a:srgbClr val="1A1A1A"/>
+                </a:solidFill>
+                <a:latin typeface="Yu Gothic UI" pitchFamily="34" charset="0"/>
+                <a:ea typeface="Yu Gothic UI" pitchFamily="34" charset="-122"/>
+                <a:cs typeface="Yu Gothic UI" pitchFamily="34" charset="-120"/>
+              </a:rPr>
+              <a:t>  - postback=faq → よくある質問リストを返信</a:t>
+            </a:r>
+            <a:endParaRPr lang="en-US" sz="1400" dirty="0"/>
+          </a:p>
+          <a:p>
+            <a:pPr indent="0" marL="0">
+              <a:spcAft>
+                <a:spcPts val="400"/>
+              </a:spcAft>
+              <a:buNone/>
+            </a:pPr>
+            <a:r>
+              <a:rPr lang="en-US" sz="1400" dirty="0">
+                <a:solidFill>
+                  <a:srgbClr val="1A1A1A"/>
+                </a:solidFill>
+                <a:latin typeface="Yu Gothic UI" pitchFamily="34" charset="0"/>
+                <a:ea typeface="Yu Gothic UI" pitchFamily="34" charset="-122"/>
+                <a:cs typeface="Yu Gothic UI" pitchFamily="34" charset="-120"/>
+              </a:rPr>
+              <a:t>・チャネルアクセストークンはスクリプトプロパティ CHANNEL_TOKEN から取得</a:t>
+            </a:r>
+            <a:endParaRPr lang="en-US" sz="1400" dirty="0"/>
+          </a:p>
+          <a:p>
+            <a:pPr indent="0" marL="0">
+              <a:spcAft>
+                <a:spcPts val="400"/>
+              </a:spcAft>
+              <a:buNone/>
+            </a:pPr>
+            <a:r>
+              <a:rPr lang="en-US" sz="1400" dirty="0">
+                <a:solidFill>
+                  <a:srgbClr val="1A1A1A"/>
+                </a:solidFill>
+                <a:latin typeface="Yu Gothic UI" pitchFamily="34" charset="0"/>
+                <a:ea typeface="Yu Gothic UI" pitchFamily="34" charset="-122"/>
+                <a:cs typeface="Yu Gothic UI" pitchFamily="34" charset="-120"/>
+              </a:rPr>
+              <a:t>・想定外の入力には「担当者が確認します、少々お待ちください」と返答</a:t>
             </a:r>
             <a:endParaRPr lang="en-US" sz="1400" dirty="0"/>
           </a:p>
@@ -2284,7 +2464,7 @@
                 <a:ea typeface="Yu Gothic UI" pitchFamily="34" charset="-122"/>
                 <a:cs typeface="Yu Gothic UI" pitchFamily="34" charset="-120"/>
               </a:rPr>
-              <a:t>・3層×5日の表(層/判定基準/日/テーマ/内容/CV)</a:t>
+              <a:t>・GAS コード(doPost + 返信関数)</a:t>
             </a:r>
             <a:endParaRPr lang="en-US" sz="1400" dirty="0"/>
           </a:p>
@@ -2304,7 +2484,47 @@
                 <a:ea typeface="Yu Gothic UI" pitchFamily="34" charset="-122"/>
                 <a:cs typeface="Yu Gothic UI" pitchFamily="34" charset="-120"/>
               </a:rPr>
-              <a:t>・スプシ用CSVテンプレ</a:t>
+              <a:t>・スクリプトプロパティ設定手順</a:t>
+            </a:r>
+            <a:endParaRPr lang="en-US" sz="1400" dirty="0"/>
+          </a:p>
+          <a:p>
+            <a:pPr indent="0" marL="0">
+              <a:spcAft>
+                <a:spcPts val="400"/>
+              </a:spcAft>
+              <a:buNone/>
+            </a:pPr>
+            <a:r>
+              <a:rPr lang="en-US" sz="1400" dirty="0">
+                <a:solidFill>
+                  <a:srgbClr val="1A1A1A"/>
+                </a:solidFill>
+                <a:latin typeface="Yu Gothic UI" pitchFamily="34" charset="0"/>
+                <a:ea typeface="Yu Gothic UI" pitchFamily="34" charset="-122"/>
+                <a:cs typeface="Yu Gothic UI" pitchFamily="34" charset="-120"/>
+              </a:rPr>
+              <a:t>・デプロイ→Webhook 登録→リッチメニュー接続 の全手順</a:t>
+            </a:r>
+            <a:endParaRPr lang="en-US" sz="1400" dirty="0"/>
+          </a:p>
+          <a:p>
+            <a:pPr indent="0" marL="0">
+              <a:spcAft>
+                <a:spcPts val="400"/>
+              </a:spcAft>
+              <a:buNone/>
+            </a:pPr>
+            <a:r>
+              <a:rPr lang="en-US" sz="1400" dirty="0">
+                <a:solidFill>
+                  <a:srgbClr val="1A1A1A"/>
+                </a:solidFill>
+                <a:latin typeface="Yu Gothic UI" pitchFamily="34" charset="0"/>
+                <a:ea typeface="Yu Gothic UI" pitchFamily="34" charset="-122"/>
+                <a:cs typeface="Yu Gothic UI" pitchFamily="34" charset="-120"/>
+              </a:rPr>
+              <a:t>・実機テストで応答確認</a:t>
             </a:r>
             <a:endParaRPr lang="en-US" sz="1400" dirty="0"/>
           </a:p>
@@ -2432,7 +2652,7 @@
                 <a:ea typeface="Yu Gothic UI" pitchFamily="34" charset="-122"/>
                 <a:cs typeface="Yu Gothic UI" pitchFamily="34" charset="-120"/>
               </a:rPr>
-              <a:t>・3層を「数字で測れる」基準にしないと運用で揺れる。</a:t>
+              <a:t>・トークン漏洩防止を必ず口頭確認。スクリプトプロパティ以外NG。</a:t>
             </a:r>
             <a:endParaRPr lang="en-US" sz="1400" dirty="0"/>
           </a:p>
@@ -2452,7 +2672,7 @@
                 <a:ea typeface="Yu Gothic UI" pitchFamily="34" charset="-122"/>
                 <a:cs typeface="Yu Gothic UI" pitchFamily="34" charset="-120"/>
               </a:rPr>
-              <a:t>・「中関心」が一番難しい。「高でも低でもない」と曖昧にしないよう細かく指定。</a:t>
+              <a:t>・「ウェブアプリとしてデプロイ」の権限設定(全員)を必ず。ここで詰まる生徒多数。</a:t>
             </a:r>
             <a:endParaRPr lang="en-US" sz="1400" dirty="0"/>
           </a:p>
@@ -2472,7 +2692,27 @@
                 <a:ea typeface="Yu Gothic UI" pitchFamily="34" charset="-122"/>
                 <a:cs typeface="Yu Gothic UI" pitchFamily="34" charset="-120"/>
               </a:rPr>
-              <a:t>・低関心への配信は控えめに。月1〜2回が現実的。</a:t>
+              <a:t>・LINE Developers の Webhook URL 登録忘れが最頻出ミス。チェックリスト化。</a:t>
+            </a:r>
+            <a:endParaRPr lang="en-US" sz="1400" dirty="0"/>
+          </a:p>
+          <a:p>
+            <a:pPr indent="0" marL="0">
+              <a:spcAft>
+                <a:spcPts val="400"/>
+              </a:spcAft>
+              <a:buNone/>
+            </a:pPr>
+            <a:r>
+              <a:rPr lang="en-US" sz="1400" dirty="0">
+                <a:solidFill>
+                  <a:srgbClr val="1A1A1A"/>
+                </a:solidFill>
+                <a:latin typeface="Yu Gothic UI" pitchFamily="34" charset="0"/>
+                <a:ea typeface="Yu Gothic UI" pitchFamily="34" charset="-122"/>
+                <a:cs typeface="Yu Gothic UI" pitchFamily="34" charset="-120"/>
+              </a:rPr>
+              <a:t>・else 節(想定外入力)を書いていない生徒に注意。無応答=沈黙は最悪UX。</a:t>
             </a:r>
             <a:endParaRPr lang="en-US" sz="1400" dirty="0"/>
           </a:p>

--- a/lecture_pptx/out/s11/ワーク01_講師用.pptx
+++ b/lecture_pptx/out/s11/ワーク01_講師用.pptx
@@ -1106,7 +1106,7 @@
                 <a:ea typeface="Yu Gothic UI Semibold" pitchFamily="34" charset="-122"/>
                 <a:cs typeface="Yu Gothic UI Semibold" pitchFamily="34" charset="-120"/>
               </a:rPr>
-              <a:t>LINE リッチメニュー × GAS チャットボット</a:t>
+              <a:t>アイテマス予約をリッチメニューに載せる</a:t>
             </a:r>
             <a:endParaRPr lang="en-US" sz="3800" dirty="0"/>
           </a:p>
@@ -1145,7 +1145,7 @@
                 <a:ea typeface="Yu Gothic UI" pitchFamily="34" charset="-122"/>
                 <a:cs typeface="Yu Gothic UI" pitchFamily="34" charset="-120"/>
               </a:rPr>
-              <a:t>保険相談の入口を24時間動かす、自作チャットボットを完成させる</a:t>
+              <a:t>LINE / L ステップの入口に「予約」ボタンを置いて取りこぼしをなくす</a:t>
             </a:r>
             <a:endParaRPr lang="en-US" sz="1900" dirty="0"/>
           </a:p>
@@ -1275,7 +1275,7 @@
                 <a:ea typeface="Yu Gothic UI Semibold" pitchFamily="34" charset="-122"/>
                 <a:cs typeface="Yu Gothic UI Semibold" pitchFamily="34" charset="-120"/>
               </a:rPr>
-              <a:t>演習1 チャットボットの動線を設計 — 解答・指導ポイント</a:t>
+              <a:t>演習1 アイテマス設定 → 予約 URL 発行 — 解答・指導ポイント</a:t>
             </a:r>
             <a:endParaRPr lang="en-US" sz="2600" dirty="0"/>
           </a:p>
@@ -1442,7 +1442,7 @@
                 <a:ea typeface="Yu Gothic UI" pitchFamily="34" charset="-122"/>
                 <a:cs typeface="Yu Gothic UI" pitchFamily="34" charset="-120"/>
               </a:rPr>
-              <a:t>【貼り付け用】</a:t>
+              <a:t>※アイテマス設定はブラウザ操作中心。Gemini に聞くなら:</a:t>
             </a:r>
             <a:endParaRPr lang="en-US" sz="1400" dirty="0"/>
           </a:p>
@@ -1462,107 +1462,7 @@
                 <a:ea typeface="Yu Gothic UI" pitchFamily="34" charset="-122"/>
                 <a:cs typeface="Yu Gothic UI" pitchFamily="34" charset="-120"/>
               </a:rPr>
-              <a:t>保険営業の LINE 公式アカウントに設置するチャットボットの動線を設計してください。</a:t>
-            </a:r>
-            <a:endParaRPr lang="en-US" sz="1400" dirty="0"/>
-          </a:p>
-          <a:p>
-            <a:pPr indent="0" marL="0">
-              <a:spcAft>
-                <a:spcPts val="400"/>
-              </a:spcAft>
-              <a:buNone/>
-            </a:pPr>
-            <a:r>
-              <a:rPr lang="en-US" sz="1400" dirty="0">
-                <a:solidFill>
-                  <a:srgbClr val="1A1A1A"/>
-                </a:solidFill>
-                <a:latin typeface="Yu Gothic UI" pitchFamily="34" charset="0"/>
-                <a:ea typeface="Yu Gothic UI" pitchFamily="34" charset="-122"/>
-                <a:cs typeface="Yu Gothic UI" pitchFamily="34" charset="-120"/>
-              </a:rPr>
-              <a:t>・リッチメニュー6ボタン: (例) 保険の種類/資料請求/相談予約/よくある質問/お客様の声/プロフィール</a:t>
-            </a:r>
-            <a:endParaRPr lang="en-US" sz="1400" dirty="0"/>
-          </a:p>
-          <a:p>
-            <a:pPr indent="0" marL="0">
-              <a:spcAft>
-                <a:spcPts val="400"/>
-              </a:spcAft>
-              <a:buNone/>
-            </a:pPr>
-            <a:r>
-              <a:rPr lang="en-US" sz="1400" dirty="0">
-                <a:solidFill>
-                  <a:srgbClr val="1A1A1A"/>
-                </a:solidFill>
-                <a:latin typeface="Yu Gothic UI" pitchFamily="34" charset="0"/>
-                <a:ea typeface="Yu Gothic UI" pitchFamily="34" charset="-122"/>
-                <a:cs typeface="Yu Gothic UI" pitchFamily="34" charset="-120"/>
-              </a:rPr>
-              <a:t>・各ボタンをタップした時の最初の返答</a:t>
-            </a:r>
-            <a:endParaRPr lang="en-US" sz="1400" dirty="0"/>
-          </a:p>
-          <a:p>
-            <a:pPr indent="0" marL="0">
-              <a:spcAft>
-                <a:spcPts val="400"/>
-              </a:spcAft>
-              <a:buNone/>
-            </a:pPr>
-            <a:r>
-              <a:rPr lang="en-US" sz="1400" dirty="0">
-                <a:solidFill>
-                  <a:srgbClr val="1A1A1A"/>
-                </a:solidFill>
-                <a:latin typeface="Yu Gothic UI" pitchFamily="34" charset="0"/>
-                <a:ea typeface="Yu Gothic UI" pitchFamily="34" charset="-122"/>
-                <a:cs typeface="Yu Gothic UI" pitchFamily="34" charset="-120"/>
-              </a:rPr>
-              <a:t>・3往復までの会話フロー</a:t>
-            </a:r>
-            <a:endParaRPr lang="en-US" sz="1400" dirty="0"/>
-          </a:p>
-          <a:p>
-            <a:pPr indent="0" marL="0">
-              <a:spcAft>
-                <a:spcPts val="400"/>
-              </a:spcAft>
-              <a:buNone/>
-            </a:pPr>
-            <a:r>
-              <a:rPr lang="en-US" sz="1400" dirty="0">
-                <a:solidFill>
-                  <a:srgbClr val="1A1A1A"/>
-                </a:solidFill>
-                <a:latin typeface="Yu Gothic UI" pitchFamily="34" charset="0"/>
-                <a:ea typeface="Yu Gothic UI" pitchFamily="34" charset="-122"/>
-                <a:cs typeface="Yu Gothic UI" pitchFamily="34" charset="-120"/>
-              </a:rPr>
-              <a:t>・最終ゴール(予約/資料DL/相談員引き渡し) を明示</a:t>
-            </a:r>
-            <a:endParaRPr lang="en-US" sz="1400" dirty="0"/>
-          </a:p>
-          <a:p>
-            <a:pPr indent="0" marL="0">
-              <a:spcAft>
-                <a:spcPts val="400"/>
-              </a:spcAft>
-              <a:buNone/>
-            </a:pPr>
-            <a:r>
-              <a:rPr lang="en-US" sz="1400" dirty="0">
-                <a:solidFill>
-                  <a:srgbClr val="1A1A1A"/>
-                </a:solidFill>
-                <a:latin typeface="Yu Gothic UI" pitchFamily="34" charset="0"/>
-                <a:ea typeface="Yu Gothic UI" pitchFamily="34" charset="-122"/>
-                <a:cs typeface="Yu Gothic UI" pitchFamily="34" charset="-120"/>
-              </a:rPr>
-              <a:t>選択肢は3つまで。難しい相談は「担当者に繋ぐ」で終わる。</a:t>
+              <a:t>「アイテマスの無料アカウントを作って、Googleカレンダーと連携し、30分/60分の面談メニューを登録する手順を、初心者向けに8ステップで教えて」</a:t>
             </a:r>
             <a:endParaRPr lang="en-US" sz="1400" dirty="0"/>
           </a:p>
@@ -1690,7 +1590,7 @@
                 <a:ea typeface="Yu Gothic UI" pitchFamily="34" charset="-122"/>
                 <a:cs typeface="Yu Gothic UI" pitchFamily="34" charset="-120"/>
               </a:rPr>
-              <a:t>・6ボタン × 動線設計表</a:t>
+              <a:t>・アイテマスの空き枠設定+Googleカレンダー連携が完了</a:t>
             </a:r>
             <a:endParaRPr lang="en-US" sz="1400" dirty="0"/>
           </a:p>
@@ -1710,7 +1610,7 @@
                 <a:ea typeface="Yu Gothic UI" pitchFamily="34" charset="-122"/>
                 <a:cs typeface="Yu Gothic UI" pitchFamily="34" charset="-120"/>
               </a:rPr>
-              <a:t>・最初の返答テキスト x 6</a:t>
+              <a:t>・30/60分の面談メニューが2種類登録され、予約URL(QR)が手元にある状態</a:t>
             </a:r>
             <a:endParaRPr lang="en-US" sz="1400" dirty="0"/>
           </a:p>
@@ -1730,27 +1630,7 @@
                 <a:ea typeface="Yu Gothic UI" pitchFamily="34" charset="-122"/>
                 <a:cs typeface="Yu Gothic UI" pitchFamily="34" charset="-120"/>
               </a:rPr>
-              <a:t>・分岐フロー図(3往復まで)</a:t>
-            </a:r>
-            <a:endParaRPr lang="en-US" sz="1400" dirty="0"/>
-          </a:p>
-          <a:p>
-            <a:pPr indent="0" marL="0">
-              <a:spcAft>
-                <a:spcPts val="400"/>
-              </a:spcAft>
-              <a:buNone/>
-            </a:pPr>
-            <a:r>
-              <a:rPr lang="en-US" sz="1400" dirty="0">
-                <a:solidFill>
-                  <a:srgbClr val="1A1A1A"/>
-                </a:solidFill>
-                <a:latin typeface="Yu Gothic UI" pitchFamily="34" charset="0"/>
-                <a:ea typeface="Yu Gothic UI" pitchFamily="34" charset="-122"/>
-                <a:cs typeface="Yu Gothic UI" pitchFamily="34" charset="-120"/>
-              </a:rPr>
-              <a:t>・ゴール別カウント</a:t>
+              <a:t>・テスト予約でカレンダーに追加+通知が届くことを確認</a:t>
             </a:r>
             <a:endParaRPr lang="en-US" sz="1400" dirty="0"/>
           </a:p>
@@ -1878,7 +1758,7 @@
                 <a:ea typeface="Yu Gothic UI" pitchFamily="34" charset="-122"/>
                 <a:cs typeface="Yu Gothic UI" pitchFamily="34" charset="-120"/>
               </a:rPr>
-              <a:t>・「全部AIで答える」設計になりがち。人に繋ぐ境界線を必ず決めさせる。</a:t>
+              <a:t>・面談メニューを増やしすぎる生徒に注意。「まず2種類」を厳守。</a:t>
             </a:r>
             <a:endParaRPr lang="en-US" sz="1400" dirty="0"/>
           </a:p>
@@ -1898,7 +1778,7 @@
                 <a:ea typeface="Yu Gothic UI" pitchFamily="34" charset="-122"/>
                 <a:cs typeface="Yu Gothic UI" pitchFamily="34" charset="-120"/>
               </a:rPr>
-              <a:t>・選択肢の数を4→3にする指導が重要。多いと押されない。</a:t>
+              <a:t>・空き時間の設定が甘くて予定と被る事故がよくある。カレンダーのブロック確認を必ず。</a:t>
             </a:r>
             <a:endParaRPr lang="en-US" sz="1400" dirty="0"/>
           </a:p>
@@ -1918,7 +1798,7 @@
                 <a:ea typeface="Yu Gothic UI" pitchFamily="34" charset="-122"/>
                 <a:cs typeface="Yu Gothic UI" pitchFamily="34" charset="-120"/>
               </a:rPr>
-              <a:t>・設計を「スプシに保存」まで徹底、これが次の演習の仕様書になる。</a:t>
+              <a:t>・テスト予約は必ずキャンセルまで見届ける。放置すると自分の予定に残る。</a:t>
             </a:r>
             <a:endParaRPr lang="en-US" sz="1400" dirty="0"/>
           </a:p>
@@ -2009,7 +1889,7 @@
                 <a:ea typeface="Yu Gothic UI Semibold" pitchFamily="34" charset="-122"/>
                 <a:cs typeface="Yu Gothic UI Semibold" pitchFamily="34" charset="-120"/>
               </a:rPr>
-              <a:t>演習2 GASでチャットボットを構築+リッチメニューに接続 — 解答・指導ポイント</a:t>
+              <a:t>演習2 リッチメニューに予約 URL を貼る + Lステップ配信に組み込む — 解答・指導ポイント</a:t>
             </a:r>
             <a:endParaRPr lang="en-US" sz="2600" dirty="0"/>
           </a:p>
@@ -2196,7 +2076,7 @@
                 <a:ea typeface="Yu Gothic UI" pitchFamily="34" charset="-122"/>
                 <a:cs typeface="Yu Gothic UI" pitchFamily="34" charset="-120"/>
               </a:rPr>
-              <a:t>LINE 公式アカウントのチャットボットを Google Apps Script で作ってください。</a:t>
+              <a:t>以下を設計してください。</a:t>
             </a:r>
             <a:endParaRPr lang="en-US" sz="1400" dirty="0"/>
           </a:p>
@@ -2216,7 +2096,7 @@
                 <a:ea typeface="Yu Gothic UI" pitchFamily="34" charset="-122"/>
                 <a:cs typeface="Yu Gothic UI" pitchFamily="34" charset="-120"/>
               </a:rPr>
-              <a:t>・仕様: doPost で Webhook を受け、以下のポストバックに応答</a:t>
+              <a:t>・リッチメニュー6枠のラベル案(1枠は必ず「予約」で目立たせる、絵文字入り)</a:t>
             </a:r>
             <a:endParaRPr lang="en-US" sz="1400" dirty="0"/>
           </a:p>
@@ -2236,7 +2116,7 @@
                 <a:ea typeface="Yu Gothic UI" pitchFamily="34" charset="-122"/>
                 <a:cs typeface="Yu Gothic UI" pitchFamily="34" charset="-120"/>
               </a:rPr>
-              <a:t>  - postback=type_life → 生命保険の説明を返信</a:t>
+              <a:t>・Lステップ(公式LINE)のステップ配信 Day1〜Day5 の各終わりに、予約URLをどう差し込むか案</a:t>
             </a:r>
             <a:endParaRPr lang="en-US" sz="1400" dirty="0"/>
           </a:p>
@@ -2256,87 +2136,7 @@
                 <a:ea typeface="Yu Gothic UI" pitchFamily="34" charset="-122"/>
                 <a:cs typeface="Yu Gothic UI" pitchFamily="34" charset="-120"/>
               </a:rPr>
-              <a:t>  - postback=doc_request → 資料請求フォームURLを返信</a:t>
-            </a:r>
-            <a:endParaRPr lang="en-US" sz="1400" dirty="0"/>
-          </a:p>
-          <a:p>
-            <a:pPr indent="0" marL="0">
-              <a:spcAft>
-                <a:spcPts val="400"/>
-              </a:spcAft>
-              <a:buNone/>
-            </a:pPr>
-            <a:r>
-              <a:rPr lang="en-US" sz="1400" dirty="0">
-                <a:solidFill>
-                  <a:srgbClr val="1A1A1A"/>
-                </a:solidFill>
-                <a:latin typeface="Yu Gothic UI" pitchFamily="34" charset="0"/>
-                <a:ea typeface="Yu Gothic UI" pitchFamily="34" charset="-122"/>
-                <a:cs typeface="Yu Gothic UI" pitchFamily="34" charset="-120"/>
-              </a:rPr>
-              <a:t>  - postback=book_meeting → 予約URLを返信</a:t>
-            </a:r>
-            <a:endParaRPr lang="en-US" sz="1400" dirty="0"/>
-          </a:p>
-          <a:p>
-            <a:pPr indent="0" marL="0">
-              <a:spcAft>
-                <a:spcPts val="400"/>
-              </a:spcAft>
-              <a:buNone/>
-            </a:pPr>
-            <a:r>
-              <a:rPr lang="en-US" sz="1400" dirty="0">
-                <a:solidFill>
-                  <a:srgbClr val="1A1A1A"/>
-                </a:solidFill>
-                <a:latin typeface="Yu Gothic UI" pitchFamily="34" charset="0"/>
-                <a:ea typeface="Yu Gothic UI" pitchFamily="34" charset="-122"/>
-                <a:cs typeface="Yu Gothic UI" pitchFamily="34" charset="-120"/>
-              </a:rPr>
-              <a:t>  - postback=faq → よくある質問リストを返信</a:t>
-            </a:r>
-            <a:endParaRPr lang="en-US" sz="1400" dirty="0"/>
-          </a:p>
-          <a:p>
-            <a:pPr indent="0" marL="0">
-              <a:spcAft>
-                <a:spcPts val="400"/>
-              </a:spcAft>
-              <a:buNone/>
-            </a:pPr>
-            <a:r>
-              <a:rPr lang="en-US" sz="1400" dirty="0">
-                <a:solidFill>
-                  <a:srgbClr val="1A1A1A"/>
-                </a:solidFill>
-                <a:latin typeface="Yu Gothic UI" pitchFamily="34" charset="0"/>
-                <a:ea typeface="Yu Gothic UI" pitchFamily="34" charset="-122"/>
-                <a:cs typeface="Yu Gothic UI" pitchFamily="34" charset="-120"/>
-              </a:rPr>
-              <a:t>・チャネルアクセストークンはスクリプトプロパティ CHANNEL_TOKEN から取得</a:t>
-            </a:r>
-            <a:endParaRPr lang="en-US" sz="1400" dirty="0"/>
-          </a:p>
-          <a:p>
-            <a:pPr indent="0" marL="0">
-              <a:spcAft>
-                <a:spcPts val="400"/>
-              </a:spcAft>
-              <a:buNone/>
-            </a:pPr>
-            <a:r>
-              <a:rPr lang="en-US" sz="1400" dirty="0">
-                <a:solidFill>
-                  <a:srgbClr val="1A1A1A"/>
-                </a:solidFill>
-                <a:latin typeface="Yu Gothic UI" pitchFamily="34" charset="0"/>
-                <a:ea typeface="Yu Gothic UI" pitchFamily="34" charset="-122"/>
-                <a:cs typeface="Yu Gothic UI" pitchFamily="34" charset="-120"/>
-              </a:rPr>
-              <a:t>・想定外の入力には「担当者が確認します、少々お待ちください」と返答</a:t>
+              <a:t>・私の商材: ●●●(生命保険/医療保険 など)、3軸: ●●●</a:t>
             </a:r>
             <a:endParaRPr lang="en-US" sz="1400" dirty="0"/>
           </a:p>
@@ -2464,7 +2264,7 @@
                 <a:ea typeface="Yu Gothic UI" pitchFamily="34" charset="-122"/>
                 <a:cs typeface="Yu Gothic UI" pitchFamily="34" charset="-120"/>
               </a:rPr>
-              <a:t>・GAS コード(doPost + 返信関数)</a:t>
+              <a:t>・6枠ラベル案 + 予約枠デザイン指示</a:t>
             </a:r>
             <a:endParaRPr lang="en-US" sz="1400" dirty="0"/>
           </a:p>
@@ -2484,7 +2284,7 @@
                 <a:ea typeface="Yu Gothic UI" pitchFamily="34" charset="-122"/>
                 <a:cs typeface="Yu Gothic UI" pitchFamily="34" charset="-120"/>
               </a:rPr>
-              <a:t>・スクリプトプロパティ設定手順</a:t>
+              <a:t>・Day1〜Day5 の予約URL差し込みポジション</a:t>
             </a:r>
             <a:endParaRPr lang="en-US" sz="1400" dirty="0"/>
           </a:p>
@@ -2504,27 +2304,7 @@
                 <a:ea typeface="Yu Gothic UI" pitchFamily="34" charset="-122"/>
                 <a:cs typeface="Yu Gothic UI" pitchFamily="34" charset="-120"/>
               </a:rPr>
-              <a:t>・デプロイ→Webhook 登録→リッチメニュー接続 の全手順</a:t>
-            </a:r>
-            <a:endParaRPr lang="en-US" sz="1400" dirty="0"/>
-          </a:p>
-          <a:p>
-            <a:pPr indent="0" marL="0">
-              <a:spcAft>
-                <a:spcPts val="400"/>
-              </a:spcAft>
-              <a:buNone/>
-            </a:pPr>
-            <a:r>
-              <a:rPr lang="en-US" sz="1400" dirty="0">
-                <a:solidFill>
-                  <a:srgbClr val="1A1A1A"/>
-                </a:solidFill>
-                <a:latin typeface="Yu Gothic UI" pitchFamily="34" charset="0"/>
-                <a:ea typeface="Yu Gothic UI" pitchFamily="34" charset="-122"/>
-                <a:cs typeface="Yu Gothic UI" pitchFamily="34" charset="-120"/>
-              </a:rPr>
-              <a:t>・実機テストで応答確認</a:t>
+              <a:t>・実機テストで両方から予約URL に遷移することを確認</a:t>
             </a:r>
             <a:endParaRPr lang="en-US" sz="1400" dirty="0"/>
           </a:p>
@@ -2652,7 +2432,7 @@
                 <a:ea typeface="Yu Gothic UI" pitchFamily="34" charset="-122"/>
                 <a:cs typeface="Yu Gothic UI" pitchFamily="34" charset="-120"/>
               </a:rPr>
-              <a:t>・トークン漏洩防止を必ず口頭確認。スクリプトプロパティ以外NG。</a:t>
+              <a:t>・予約枠が地味になりがち。色/絵文字で1枠だけ「浮かせる」指導を。</a:t>
             </a:r>
             <a:endParaRPr lang="en-US" sz="1400" dirty="0"/>
           </a:p>
@@ -2672,7 +2452,7 @@
                 <a:ea typeface="Yu Gothic UI" pitchFamily="34" charset="-122"/>
                 <a:cs typeface="Yu Gothic UI" pitchFamily="34" charset="-120"/>
               </a:rPr>
-              <a:t>・「ウェブアプリとしてデプロイ」の権限設定(全員)を必ず。ここで詰まる生徒多数。</a:t>
+              <a:t>・全 Day に予約URL を貼ろうとする生徒あり。しつこくなるので Day3+Day5 の2箇所が無難。</a:t>
             </a:r>
             <a:endParaRPr lang="en-US" sz="1400" dirty="0"/>
           </a:p>
@@ -2692,27 +2472,7 @@
                 <a:ea typeface="Yu Gothic UI" pitchFamily="34" charset="-122"/>
                 <a:cs typeface="Yu Gothic UI" pitchFamily="34" charset="-120"/>
               </a:rPr>
-              <a:t>・LINE Developers の Webhook URL 登録忘れが最頻出ミス。チェックリスト化。</a:t>
-            </a:r>
-            <a:endParaRPr lang="en-US" sz="1400" dirty="0"/>
-          </a:p>
-          <a:p>
-            <a:pPr indent="0" marL="0">
-              <a:spcAft>
-                <a:spcPts val="400"/>
-              </a:spcAft>
-              <a:buNone/>
-            </a:pPr>
-            <a:r>
-              <a:rPr lang="en-US" sz="1400" dirty="0">
-                <a:solidFill>
-                  <a:srgbClr val="1A1A1A"/>
-                </a:solidFill>
-                <a:latin typeface="Yu Gothic UI" pitchFamily="34" charset="0"/>
-                <a:ea typeface="Yu Gothic UI" pitchFamily="34" charset="-122"/>
-                <a:cs typeface="Yu Gothic UI" pitchFamily="34" charset="-120"/>
-              </a:rPr>
-              <a:t>・else 節(想定外入力)を書いていない生徒に注意。無応答=沈黙は最悪UX。</a:t>
+              <a:t>・実機テストで「予約→戻る→予約」の往復で意図した挙動になるか確認させる。</a:t>
             </a:r>
             <a:endParaRPr lang="en-US" sz="1400" dirty="0"/>
           </a:p>
